--- a/27-dars - Sodda bazalar yaratish va so'rovlar/27-dars - Slayd.pptx
+++ b/27-dars - Sodda bazalar yaratish va so'rovlar/27-dars - Slayd.pptx
@@ -2981,7 +2981,7 @@
                 <a:ea typeface="Calibri" pitchFamily="34" charset="-122"/>
                 <a:cs typeface="Calibri" pitchFamily="34" charset="-120"/>
               </a:rPr>
-              <a:t>Kerakli ustunlarни tanlash.</a:t>
+              <a:t>Kerakli ustunlarni tanlash.</a:t>
             </a:r>
             <a:endParaRPr lang="en-US" sz="1080" dirty="0"/>
           </a:p>
@@ -4078,7 +4078,7 @@
                 <a:ea typeface="Calibri" pitchFamily="34" charset="-122"/>
                 <a:cs typeface="Calibri" pitchFamily="34" charset="-120"/>
               </a:rPr>
-              <a:t>26-darsда tuzgan bazangни (yoki yangisini) och.</a:t>
+              <a:t>26-darsda tuzgan bazangni (yoki yangisini) och.</a:t>
             </a:r>
             <a:endParaRPr lang="en-US" sz="1350" dirty="0"/>
           </a:p>
@@ -4280,7 +4280,7 @@
                 <a:ea typeface="Calibri" pitchFamily="34" charset="-122"/>
                 <a:cs typeface="Calibri" pitchFamily="34" charset="-120"/>
               </a:rPr>
-              <a:t>Ismi "Otabek" (yoki boshqa nom) bo'lgan kishilarни topuvchi shart yoz.</a:t>
+              <a:t>Ismi "Otabek" (yoki boshqa nom) bo'lgan kishilarni topuvchi shart yoz.</a:t>
             </a:r>
             <a:endParaRPr lang="en-US" sz="1350" dirty="0"/>
           </a:p>
@@ -4381,7 +4381,7 @@
                 <a:ea typeface="Calibri" pitchFamily="34" charset="-122"/>
                 <a:cs typeface="Calibri" pitchFamily="34" charset="-120"/>
               </a:rPr>
-              <a:t>Natijада faqat ism, familiya va telefon maydonларини ko'rsat.</a:t>
+              <a:t>Natijada faqat ism, familiya va telefon maydonlarini ko'rsat.</a:t>
             </a:r>
             <a:endParaRPr lang="en-US" sz="1350" dirty="0"/>
           </a:p>
@@ -4482,7 +4482,7 @@
                 <a:ea typeface="Calibri" pitchFamily="34" charset="-122"/>
                 <a:cs typeface="Calibri" pitchFamily="34" charset="-120"/>
               </a:rPr>
-              <a:t>So'rovни ishga tushir va natijани saqla.</a:t>
+              <a:t>So'rovni ishga tushir va natijani saqla.</a:t>
             </a:r>
             <a:endParaRPr lang="en-US" sz="1350" dirty="0"/>
           </a:p>
@@ -4881,7 +4881,7 @@
                 <a:ea typeface="Calibri" pitchFamily="34" charset="-122"/>
                 <a:cs typeface="Calibri" pitchFamily="34" charset="-120"/>
               </a:rPr>
-              <a:t>So'rovда maydonni qanday tanlanadi?</a:t>
+              <a:t>So'rovda maydonni qanday tanlanadi?</a:t>
             </a:r>
             <a:endParaRPr lang="en-US" sz="1300" dirty="0"/>
           </a:p>
@@ -4962,7 +4962,7 @@
                 <a:ea typeface="Calibri" pitchFamily="34" charset="-122"/>
                 <a:cs typeface="Calibri" pitchFamily="34" charset="-120"/>
               </a:rPr>
-              <a:t>So'rov natijаси qanday ko'rinishда chiqadi?</a:t>
+              <a:t>So'rov natijasi qanday ko'rinishda chiqadi?</a:t>
             </a:r>
             <a:endParaRPr lang="en-US" sz="1300" dirty="0"/>
           </a:p>
@@ -5096,7 +5096,7 @@
                 <a:ea typeface="Calibri" pitchFamily="34" charset="-122"/>
                 <a:cs typeface="Calibri" pitchFamily="34" charset="-120"/>
               </a:rPr>
-              <a:t>Kitoblar bazangizдан faqat ma'lum bir janrдаги kitoblarни ajratib oluvchi so'rov tuzing.</a:t>
+              <a:t>Kitoblar bazangizdan faqat ma'lum bir janrdagi kitoblarni ajratib oluvchi so'rov tuzing.</a:t>
             </a:r>
             <a:endParaRPr lang="en-US" sz="1450" dirty="0"/>
           </a:p>
